--- a/Slides/Week03/00：課程大綱.pptx
+++ b/Slides/Week03/00：課程大綱.pptx
@@ -238,7 +238,7 @@
             <a:fld id="{68F88C59-319B-4332-9A1D-2A62CFCB00D8}" type="datetimeFigureOut">
               <a:rPr lang="en-US" smtClean="0"/>
               <a:pPr/>
-              <a:t>4/11/2024</a:t>
+              <a:t>12/9/2024</a:t>
             </a:fld>
             <a:endParaRPr lang="en-US" dirty="0"/>
           </a:p>
@@ -409,7 +409,7 @@
             <a:fld id="{968B300D-05F0-4B43-940D-46DED5A791AD}" type="datetimeFigureOut">
               <a:rPr lang="en-US" smtClean="0"/>
               <a:pPr/>
-              <a:t>4/11/2024</a:t>
+              <a:t>12/9/2024</a:t>
             </a:fld>
             <a:endParaRPr lang="en-US" dirty="0"/>
           </a:p>
@@ -2097,7 +2097,7 @@
                 </a:solidFill>
               </a:rPr>
               <a:pPr/>
-              <a:t>4/11/2024</a:t>
+              <a:t>12/9/2024</a:t>
             </a:fld>
             <a:endParaRPr kumimoji="0" lang="en-US" dirty="0"/>
           </a:p>
@@ -2488,7 +2488,7 @@
                 </a:solidFill>
               </a:rPr>
               <a:pPr/>
-              <a:t>4/11/2024</a:t>
+              <a:t>12/9/2024</a:t>
             </a:fld>
             <a:endParaRPr kumimoji="0" lang="en-US" dirty="0"/>
           </a:p>
@@ -2823,7 +2823,7 @@
                 </a:solidFill>
               </a:rPr>
               <a:pPr/>
-              <a:t>4/11/2024</a:t>
+              <a:t>12/9/2024</a:t>
             </a:fld>
             <a:endParaRPr kumimoji="0" lang="en-US" dirty="0"/>
           </a:p>
@@ -3399,7 +3399,7 @@
                 </a:solidFill>
               </a:rPr>
               <a:pPr/>
-              <a:t>4/11/2024</a:t>
+              <a:t>12/9/2024</a:t>
             </a:fld>
             <a:endParaRPr kumimoji="0" lang="en-US" dirty="0"/>
           </a:p>
@@ -3963,7 +3963,7 @@
                 </a:solidFill>
               </a:rPr>
               <a:pPr/>
-              <a:t>4/11/2024</a:t>
+              <a:t>12/9/2024</a:t>
             </a:fld>
             <a:endParaRPr kumimoji="0" lang="en-US" dirty="0"/>
           </a:p>
@@ -4422,7 +4422,7 @@
                 </a:solidFill>
               </a:rPr>
               <a:pPr/>
-              <a:t>4/11/2024</a:t>
+              <a:t>12/9/2024</a:t>
             </a:fld>
             <a:endParaRPr kumimoji="0" lang="en-US" dirty="0"/>
           </a:p>
@@ -4846,7 +4846,7 @@
                 </a:solidFill>
               </a:rPr>
               <a:pPr/>
-              <a:t>4/11/2024</a:t>
+              <a:t>12/9/2024</a:t>
             </a:fld>
             <a:endParaRPr kumimoji="0" lang="en-US" dirty="0"/>
           </a:p>
@@ -5350,7 +5350,7 @@
                 </a:solidFill>
               </a:rPr>
               <a:pPr/>
-              <a:t>4/11/2024</a:t>
+              <a:t>12/9/2024</a:t>
             </a:fld>
             <a:endParaRPr kumimoji="0" lang="en-US" dirty="0"/>
           </a:p>
@@ -5854,7 +5854,7 @@
                 </a:solidFill>
               </a:rPr>
               <a:pPr/>
-              <a:t>4/11/2024</a:t>
+              <a:t>12/9/2024</a:t>
             </a:fld>
             <a:endParaRPr kumimoji="0" lang="en-US" dirty="0"/>
           </a:p>
@@ -6070,7 +6070,7 @@
                 </a:solidFill>
               </a:rPr>
               <a:pPr/>
-              <a:t>4/11/2024</a:t>
+              <a:t>12/9/2024</a:t>
             </a:fld>
             <a:endParaRPr kumimoji="0" lang="en-US" dirty="0"/>
           </a:p>
@@ -6398,7 +6398,7 @@
                 </a:solidFill>
               </a:rPr>
               <a:pPr/>
-              <a:t>4/11/2024</a:t>
+              <a:t>12/9/2024</a:t>
             </a:fld>
             <a:endParaRPr kumimoji="0" lang="en-US" dirty="0"/>
           </a:p>
@@ -6624,7 +6624,7 @@
                 </a:solidFill>
               </a:rPr>
               <a:pPr/>
-              <a:t>4/11/2024</a:t>
+              <a:t>12/9/2024</a:t>
             </a:fld>
             <a:endParaRPr kumimoji="0" lang="en-US" dirty="0"/>
           </a:p>
@@ -6843,7 +6843,7 @@
                 </a:solidFill>
               </a:rPr>
               <a:pPr/>
-              <a:t>4/11/2024</a:t>
+              <a:t>12/9/2024</a:t>
             </a:fld>
             <a:endParaRPr kumimoji="0" lang="en-US" dirty="0"/>
           </a:p>
@@ -7019,7 +7019,7 @@
             <a:fld id="{ACB2EC6F-6501-4E04-BD6C-A8A6CABB2C5B}" type="datetimeFigureOut">
               <a:rPr kumimoji="0" lang="en-US" smtClean="0"/>
               <a:pPr/>
-              <a:t>4/11/2024</a:t>
+              <a:t>12/9/2024</a:t>
             </a:fld>
             <a:endParaRPr kumimoji="0" lang="en-US" dirty="0"/>
           </a:p>
@@ -7264,7 +7264,7 @@
                 </a:solidFill>
               </a:rPr>
               <a:pPr/>
-              <a:t>4/11/2024</a:t>
+              <a:t>12/9/2024</a:t>
             </a:fld>
             <a:endParaRPr kumimoji="0" lang="en-US" dirty="0"/>
           </a:p>
@@ -7736,7 +7736,7 @@
                 </a:solidFill>
               </a:rPr>
               <a:pPr/>
-              <a:t>4/11/2024</a:t>
+              <a:t>12/9/2024</a:t>
             </a:fld>
             <a:endParaRPr kumimoji="0" lang="en-US" dirty="0"/>
           </a:p>
@@ -8088,7 +8088,7 @@
                 </a:solidFill>
               </a:rPr>
               <a:pPr/>
-              <a:t>4/11/2024</a:t>
+              <a:t>12/9/2024</a:t>
             </a:fld>
             <a:endParaRPr kumimoji="0" lang="en-US" dirty="0"/>
           </a:p>
@@ -8446,7 +8446,7 @@
                 </a:solidFill>
               </a:rPr>
               <a:pPr/>
-              <a:t>4/11/2024</a:t>
+              <a:t>12/9/2024</a:t>
             </a:fld>
             <a:endParaRPr kumimoji="0" lang="en-US" dirty="0"/>
           </a:p>
@@ -8751,7 +8751,7 @@
                 </a:solidFill>
               </a:rPr>
               <a:pPr/>
-              <a:t>4/11/2024</a:t>
+              <a:t>12/9/2024</a:t>
             </a:fld>
             <a:endParaRPr kumimoji="0" lang="en-US" dirty="0"/>
           </a:p>
@@ -9227,7 +9227,7 @@
                 </a:solidFill>
               </a:rPr>
               <a:pPr/>
-              <a:t>4/11/2024</a:t>
+              <a:t>12/9/2024</a:t>
             </a:fld>
             <a:endParaRPr kumimoji="0" lang="en-US" dirty="0"/>
           </a:p>
@@ -9464,7 +9464,7 @@
                 </a:solidFill>
               </a:rPr>
               <a:pPr/>
-              <a:t>4/11/2024</a:t>
+              <a:t>12/9/2024</a:t>
             </a:fld>
             <a:endParaRPr kumimoji="0" lang="en-US" sz="1200" dirty="0">
               <a:solidFill>
@@ -10039,7 +10039,7 @@
                 <a:latin typeface="微軟正黑體" panose="020B0604030504040204" pitchFamily="34" charset="-120"/>
                 <a:ea typeface="微軟正黑體" panose="020B0604030504040204" pitchFamily="34" charset="-120"/>
               </a:rPr>
-              <a:t>3</a:t>
+              <a:t>11</a:t>
             </a:r>
             <a:r>
               <a:rPr lang="zh-TW" altLang="en-US" sz="2400" b="1" dirty="0">
@@ -10049,14 +10049,14 @@
               <a:t>月</a:t>
             </a:r>
             <a:r>
-              <a:rPr lang="en-US" altLang="zh-TW" sz="2400" b="1" dirty="0">
+              <a:rPr lang="en-US" altLang="zh-TW" sz="2400" b="1">
                 <a:latin typeface="微軟正黑體" panose="020B0604030504040204" pitchFamily="34" charset="-120"/>
                 <a:ea typeface="微軟正黑體" panose="020B0604030504040204" pitchFamily="34" charset="-120"/>
               </a:rPr>
-              <a:t>-5</a:t>
-            </a:r>
-            <a:r>
-              <a:rPr lang="zh-TW" altLang="en-US" sz="2400" b="1" dirty="0">
+              <a:t>12</a:t>
+            </a:r>
+            <a:r>
+              <a:rPr lang="zh-TW" altLang="en-US" sz="2400" b="1">
                 <a:latin typeface="微軟正黑體" panose="020B0604030504040204" pitchFamily="34" charset="-120"/>
                 <a:ea typeface="微軟正黑體" panose="020B0604030504040204" pitchFamily="34" charset="-120"/>
               </a:rPr>
